--- a/week4 - Blade 2/M8Prog laravel 05 - Component Layouts.pptx
+++ b/week4 - Blade 2/M8Prog laravel 05 - Component Layouts.pptx
@@ -8,8 +8,11 @@
     <p:sldId id="256" r:id="rId2"/>
     <p:sldId id="258" r:id="rId3"/>
     <p:sldId id="289" r:id="rId4"/>
-    <p:sldId id="290" r:id="rId5"/>
-    <p:sldId id="288" r:id="rId6"/>
+    <p:sldId id="291" r:id="rId5"/>
+    <p:sldId id="292" r:id="rId6"/>
+    <p:sldId id="290" r:id="rId7"/>
+    <p:sldId id="293" r:id="rId8"/>
+    <p:sldId id="288" r:id="rId9"/>
   </p:sldIdLst>
   <p:sldSz cx="12192000" cy="6858000"/>
   <p:notesSz cx="6858000" cy="9144000"/>
@@ -3871,6 +3874,321 @@
         <p:cNvPr id="1" name="">
           <a:extLst>
             <a:ext uri="{FF2B5EF4-FFF2-40B4-BE49-F238E27FC236}">
+              <a16:creationId xmlns:a16="http://schemas.microsoft.com/office/drawing/2014/main" id="{B5D9186E-732A-B25A-0E92-58B9357A5E32}"/>
+            </a:ext>
+          </a:extLst>
+        </p:cNvPr>
+        <p:cNvGrpSpPr/>
+        <p:nvPr/>
+      </p:nvGrpSpPr>
+      <p:grpSpPr>
+        <a:xfrm>
+          <a:off x="0" y="0"/>
+          <a:ext cx="0" cy="0"/>
+          <a:chOff x="0" y="0"/>
+          <a:chExt cx="0" cy="0"/>
+        </a:xfrm>
+      </p:grpSpPr>
+      <p:sp>
+        <p:nvSpPr>
+          <p:cNvPr id="2" name="Title 1">
+            <a:extLst>
+              <a:ext uri="{FF2B5EF4-FFF2-40B4-BE49-F238E27FC236}">
+                <a16:creationId xmlns:a16="http://schemas.microsoft.com/office/drawing/2014/main" id="{C609C1C7-2C47-9E02-E741-5A73E924028D}"/>
+              </a:ext>
+            </a:extLst>
+          </p:cNvPr>
+          <p:cNvSpPr>
+            <a:spLocks noGrp="1"/>
+          </p:cNvSpPr>
+          <p:nvPr>
+            <p:ph type="title"/>
+          </p:nvPr>
+        </p:nvSpPr>
+        <p:spPr/>
+        <p:txBody>
+          <a:bodyPr/>
+          <a:lstStyle/>
+          <a:p>
+            <a:r>
+              <a:rPr lang="nl-NL" dirty="0"/>
+              <a:t>X-app-</a:t>
+            </a:r>
+            <a:r>
+              <a:rPr lang="nl-NL" dirty="0" err="1"/>
+              <a:t>layout</a:t>
+            </a:r>
+            <a:endParaRPr lang="nl-NL" dirty="0"/>
+          </a:p>
+        </p:txBody>
+      </p:sp>
+      <p:sp>
+        <p:nvSpPr>
+          <p:cNvPr id="3" name="Content Placeholder 2">
+            <a:extLst>
+              <a:ext uri="{FF2B5EF4-FFF2-40B4-BE49-F238E27FC236}">
+                <a16:creationId xmlns:a16="http://schemas.microsoft.com/office/drawing/2014/main" id="{8262AA99-04AF-FA6B-D11C-134DB6B55A51}"/>
+              </a:ext>
+            </a:extLst>
+          </p:cNvPr>
+          <p:cNvSpPr>
+            <a:spLocks noGrp="1"/>
+          </p:cNvSpPr>
+          <p:nvPr>
+            <p:ph idx="1"/>
+          </p:nvPr>
+        </p:nvSpPr>
+        <p:spPr>
+          <a:xfrm>
+            <a:off x="838200" y="1852785"/>
+            <a:ext cx="9971638" cy="1325563"/>
+          </a:xfrm>
+        </p:spPr>
+        <p:txBody>
+          <a:bodyPr>
+            <a:normAutofit fontScale="85000" lnSpcReduction="20000"/>
+          </a:bodyPr>
+          <a:lstStyle/>
+          <a:p>
+            <a:r>
+              <a:rPr lang="nl-NL" dirty="0"/>
+              <a:t>X-</a:t>
+            </a:r>
+            <a:r>
+              <a:rPr lang="nl-NL" dirty="0" err="1"/>
+              <a:t>slots</a:t>
+            </a:r>
+            <a:r>
+              <a:rPr lang="nl-NL" dirty="0"/>
+              <a:t> worden variabelen </a:t>
+            </a:r>
+          </a:p>
+          <a:p>
+            <a:pPr lvl="1"/>
+            <a:r>
+              <a:rPr lang="nl-NL" dirty="0"/>
+              <a:t>$</a:t>
+            </a:r>
+            <a:r>
+              <a:rPr lang="nl-NL" dirty="0" err="1"/>
+              <a:t>title</a:t>
+            </a:r>
+            <a:endParaRPr lang="nl-NL" dirty="0"/>
+          </a:p>
+          <a:p>
+            <a:pPr lvl="1"/>
+            <a:r>
+              <a:rPr lang="nl-NL" dirty="0"/>
+              <a:t>$content</a:t>
+            </a:r>
+          </a:p>
+          <a:p>
+            <a:r>
+              <a:rPr lang="nl-NL" dirty="0"/>
+              <a:t>Die gebruik je in je </a:t>
+            </a:r>
+            <a:r>
+              <a:rPr lang="nl-NL" dirty="0" err="1"/>
+              <a:t>layout</a:t>
+            </a:r>
+            <a:r>
+              <a:rPr lang="nl-NL" dirty="0"/>
+              <a:t> </a:t>
+            </a:r>
+            <a:r>
+              <a:rPr lang="nl-NL" dirty="0" err="1"/>
+              <a:t>blade</a:t>
+            </a:r>
+            <a:endParaRPr lang="nl-NL" dirty="0"/>
+          </a:p>
+        </p:txBody>
+      </p:sp>
+      <p:pic>
+        <p:nvPicPr>
+          <p:cNvPr id="5" name="Picture 4">
+            <a:extLst>
+              <a:ext uri="{FF2B5EF4-FFF2-40B4-BE49-F238E27FC236}">
+                <a16:creationId xmlns:a16="http://schemas.microsoft.com/office/drawing/2014/main" id="{D30F8816-D968-2BAF-B594-1B541952731B}"/>
+              </a:ext>
+            </a:extLst>
+          </p:cNvPr>
+          <p:cNvPicPr>
+            <a:picLocks noChangeAspect="1"/>
+          </p:cNvPicPr>
+          <p:nvPr/>
+        </p:nvPicPr>
+        <p:blipFill>
+          <a:blip r:embed="rId2"/>
+          <a:stretch>
+            <a:fillRect/>
+          </a:stretch>
+        </p:blipFill>
+        <p:spPr>
+          <a:xfrm>
+            <a:off x="1591456" y="3178348"/>
+            <a:ext cx="8532526" cy="3679652"/>
+          </a:xfrm>
+          <a:prstGeom prst="rect">
+            <a:avLst/>
+          </a:prstGeom>
+        </p:spPr>
+      </p:pic>
+    </p:spTree>
+    <p:extLst>
+      <p:ext uri="{BB962C8B-B14F-4D97-AF65-F5344CB8AC3E}">
+        <p14:creationId xmlns:p14="http://schemas.microsoft.com/office/powerpoint/2010/main" val="2464251627"/>
+      </p:ext>
+    </p:extLst>
+  </p:cSld>
+  <p:clrMapOvr>
+    <a:masterClrMapping/>
+  </p:clrMapOvr>
+</p:sld>
+</file>
+
+<file path=ppt/slides/slide5.xml><?xml version="1.0" encoding="utf-8"?>
+<p:sld xmlns:a="http://schemas.openxmlformats.org/drawingml/2006/main" xmlns:r="http://schemas.openxmlformats.org/officeDocument/2006/relationships" xmlns:p="http://schemas.openxmlformats.org/presentationml/2006/main">
+  <p:cSld>
+    <p:spTree>
+      <p:nvGrpSpPr>
+        <p:cNvPr id="1" name="">
+          <a:extLst>
+            <a:ext uri="{FF2B5EF4-FFF2-40B4-BE49-F238E27FC236}">
+              <a16:creationId xmlns:a16="http://schemas.microsoft.com/office/drawing/2014/main" id="{DB63BB7F-EF96-D2F2-1B39-324F005012EA}"/>
+            </a:ext>
+          </a:extLst>
+        </p:cNvPr>
+        <p:cNvGrpSpPr/>
+        <p:nvPr/>
+      </p:nvGrpSpPr>
+      <p:grpSpPr>
+        <a:xfrm>
+          <a:off x="0" y="0"/>
+          <a:ext cx="0" cy="0"/>
+          <a:chOff x="0" y="0"/>
+          <a:chExt cx="0" cy="0"/>
+        </a:xfrm>
+      </p:grpSpPr>
+      <p:sp>
+        <p:nvSpPr>
+          <p:cNvPr id="2" name="Title 1">
+            <a:extLst>
+              <a:ext uri="{FF2B5EF4-FFF2-40B4-BE49-F238E27FC236}">
+                <a16:creationId xmlns:a16="http://schemas.microsoft.com/office/drawing/2014/main" id="{BE5BDBD6-961F-24A3-EB6A-368485ADC0A0}"/>
+              </a:ext>
+            </a:extLst>
+          </p:cNvPr>
+          <p:cNvSpPr>
+            <a:spLocks noGrp="1"/>
+          </p:cNvSpPr>
+          <p:nvPr>
+            <p:ph type="title"/>
+          </p:nvPr>
+        </p:nvSpPr>
+        <p:spPr/>
+        <p:txBody>
+          <a:bodyPr/>
+          <a:lstStyle/>
+          <a:p>
+            <a:r>
+              <a:rPr lang="nl-NL" dirty="0"/>
+              <a:t>Slot gebruiken</a:t>
+            </a:r>
+          </a:p>
+        </p:txBody>
+      </p:sp>
+      <p:sp>
+        <p:nvSpPr>
+          <p:cNvPr id="3" name="Content Placeholder 2">
+            <a:extLst>
+              <a:ext uri="{FF2B5EF4-FFF2-40B4-BE49-F238E27FC236}">
+                <a16:creationId xmlns:a16="http://schemas.microsoft.com/office/drawing/2014/main" id="{0DA76CC9-C04C-EF85-B24D-E4E10D8D2B88}"/>
+              </a:ext>
+            </a:extLst>
+          </p:cNvPr>
+          <p:cNvSpPr>
+            <a:spLocks noGrp="1"/>
+          </p:cNvSpPr>
+          <p:nvPr>
+            <p:ph idx="1"/>
+          </p:nvPr>
+        </p:nvSpPr>
+        <p:spPr>
+          <a:xfrm>
+            <a:off x="838200" y="1897755"/>
+            <a:ext cx="9971638" cy="1325563"/>
+          </a:xfrm>
+        </p:spPr>
+        <p:txBody>
+          <a:bodyPr/>
+          <a:lstStyle/>
+          <a:p>
+            <a:r>
+              <a:rPr lang="nl-NL" dirty="0"/>
+              <a:t>{{$</a:t>
+            </a:r>
+            <a:r>
+              <a:rPr lang="nl-NL" dirty="0" err="1"/>
+              <a:t>je_slot_naam</a:t>
+            </a:r>
+            <a:r>
+              <a:rPr lang="nl-NL" dirty="0"/>
+              <a:t>}}</a:t>
+            </a:r>
+          </a:p>
+        </p:txBody>
+      </p:sp>
+      <p:pic>
+        <p:nvPicPr>
+          <p:cNvPr id="5" name="Picture 4">
+            <a:extLst>
+              <a:ext uri="{FF2B5EF4-FFF2-40B4-BE49-F238E27FC236}">
+                <a16:creationId xmlns:a16="http://schemas.microsoft.com/office/drawing/2014/main" id="{89BBBFE6-60A8-3F49-DC89-A16AD79499D4}"/>
+              </a:ext>
+            </a:extLst>
+          </p:cNvPr>
+          <p:cNvPicPr>
+            <a:picLocks noChangeAspect="1"/>
+          </p:cNvPicPr>
+          <p:nvPr/>
+        </p:nvPicPr>
+        <p:blipFill>
+          <a:blip r:embed="rId2"/>
+          <a:stretch>
+            <a:fillRect/>
+          </a:stretch>
+        </p:blipFill>
+        <p:spPr>
+          <a:xfrm>
+            <a:off x="5209422" y="2170374"/>
+            <a:ext cx="6568878" cy="4802187"/>
+          </a:xfrm>
+          <a:prstGeom prst="rect">
+            <a:avLst/>
+          </a:prstGeom>
+        </p:spPr>
+      </p:pic>
+    </p:spTree>
+    <p:extLst>
+      <p:ext uri="{BB962C8B-B14F-4D97-AF65-F5344CB8AC3E}">
+        <p14:creationId xmlns:p14="http://schemas.microsoft.com/office/powerpoint/2010/main" val="3608313067"/>
+      </p:ext>
+    </p:extLst>
+  </p:cSld>
+  <p:clrMapOvr>
+    <a:masterClrMapping/>
+  </p:clrMapOvr>
+</p:sld>
+</file>
+
+<file path=ppt/slides/slide6.xml><?xml version="1.0" encoding="utf-8"?>
+<p:sld xmlns:a="http://schemas.openxmlformats.org/drawingml/2006/main" xmlns:r="http://schemas.openxmlformats.org/officeDocument/2006/relationships" xmlns:p="http://schemas.openxmlformats.org/presentationml/2006/main">
+  <p:cSld>
+    <p:spTree>
+      <p:nvGrpSpPr>
+        <p:cNvPr id="1" name="">
+          <a:extLst>
+            <a:ext uri="{FF2B5EF4-FFF2-40B4-BE49-F238E27FC236}">
               <a16:creationId xmlns:a16="http://schemas.microsoft.com/office/drawing/2014/main" id="{C1055D67-D34D-D5B2-1112-9C9A28E8C20F}"/>
             </a:ext>
           </a:extLst>
@@ -3945,6 +4263,13 @@
               <a:t>Waar je wat zet bepaald de naam</a:t>
             </a:r>
           </a:p>
+          <a:p>
+            <a:pPr lvl="1"/>
+            <a:r>
+              <a:rPr lang="nl-NL" dirty="0"/>
+              <a:t>Extra directory? Dat kan met een PUNT</a:t>
+            </a:r>
+          </a:p>
         </p:txBody>
       </p:sp>
       <p:pic>
@@ -3969,7 +4294,7 @@
         </p:blipFill>
         <p:spPr>
           <a:xfrm>
-            <a:off x="4176477" y="3784584"/>
+            <a:off x="838200" y="3679653"/>
             <a:ext cx="6041507" cy="2249028"/>
           </a:xfrm>
           <a:prstGeom prst="rect">
@@ -3990,7 +4315,188 @@
 </p:sld>
 </file>
 
-<file path=ppt/slides/slide5.xml><?xml version="1.0" encoding="utf-8"?>
+<file path=ppt/slides/slide7.xml><?xml version="1.0" encoding="utf-8"?>
+<p:sld xmlns:a="http://schemas.openxmlformats.org/drawingml/2006/main" xmlns:r="http://schemas.openxmlformats.org/officeDocument/2006/relationships" xmlns:p="http://schemas.openxmlformats.org/presentationml/2006/main">
+  <p:cSld>
+    <p:spTree>
+      <p:nvGrpSpPr>
+        <p:cNvPr id="1" name="">
+          <a:extLst>
+            <a:ext uri="{FF2B5EF4-FFF2-40B4-BE49-F238E27FC236}">
+              <a16:creationId xmlns:a16="http://schemas.microsoft.com/office/drawing/2014/main" id="{C16FB21D-B9C7-0E59-E7F8-2191DE4F5DA0}"/>
+            </a:ext>
+          </a:extLst>
+        </p:cNvPr>
+        <p:cNvGrpSpPr/>
+        <p:nvPr/>
+      </p:nvGrpSpPr>
+      <p:grpSpPr>
+        <a:xfrm>
+          <a:off x="0" y="0"/>
+          <a:ext cx="0" cy="0"/>
+          <a:chOff x="0" y="0"/>
+          <a:chExt cx="0" cy="0"/>
+        </a:xfrm>
+      </p:grpSpPr>
+      <p:sp>
+        <p:nvSpPr>
+          <p:cNvPr id="2" name="Title 1">
+            <a:extLst>
+              <a:ext uri="{FF2B5EF4-FFF2-40B4-BE49-F238E27FC236}">
+                <a16:creationId xmlns:a16="http://schemas.microsoft.com/office/drawing/2014/main" id="{E3C8280E-007C-7396-C550-06BEF936C696}"/>
+              </a:ext>
+            </a:extLst>
+          </p:cNvPr>
+          <p:cNvSpPr>
+            <a:spLocks noGrp="1"/>
+          </p:cNvSpPr>
+          <p:nvPr>
+            <p:ph type="title"/>
+          </p:nvPr>
+        </p:nvSpPr>
+        <p:spPr/>
+        <p:txBody>
+          <a:bodyPr/>
+          <a:lstStyle/>
+          <a:p>
+            <a:r>
+              <a:rPr lang="nl-NL" dirty="0"/>
+              <a:t>Component map</a:t>
+            </a:r>
+          </a:p>
+        </p:txBody>
+      </p:sp>
+      <p:sp>
+        <p:nvSpPr>
+          <p:cNvPr id="3" name="Content Placeholder 2">
+            <a:extLst>
+              <a:ext uri="{FF2B5EF4-FFF2-40B4-BE49-F238E27FC236}">
+                <a16:creationId xmlns:a16="http://schemas.microsoft.com/office/drawing/2014/main" id="{282A24D0-EE7B-F46E-F5DC-7E1AC1D88C67}"/>
+              </a:ext>
+            </a:extLst>
+          </p:cNvPr>
+          <p:cNvSpPr>
+            <a:spLocks noGrp="1"/>
+          </p:cNvSpPr>
+          <p:nvPr>
+            <p:ph idx="1"/>
+          </p:nvPr>
+        </p:nvSpPr>
+        <p:spPr>
+          <a:xfrm>
+            <a:off x="838200" y="1852785"/>
+            <a:ext cx="9971638" cy="1325563"/>
+          </a:xfrm>
+        </p:spPr>
+        <p:txBody>
+          <a:bodyPr/>
+          <a:lstStyle/>
+          <a:p>
+            <a:r>
+              <a:rPr lang="nl-NL" dirty="0"/>
+              <a:t>Demo-panel = &lt;x-demo-panel</a:t>
+            </a:r>
+          </a:p>
+          <a:p>
+            <a:r>
+              <a:rPr lang="nl-NL" dirty="0" err="1"/>
+              <a:t>Layout</a:t>
+            </a:r>
+            <a:r>
+              <a:rPr lang="nl-NL" dirty="0"/>
+              <a:t> = &lt;x-</a:t>
+            </a:r>
+            <a:r>
+              <a:rPr lang="nl-NL" dirty="0" err="1"/>
+              <a:t>layout.app</a:t>
+            </a:r>
+            <a:r>
+              <a:rPr lang="nl-NL" dirty="0"/>
+              <a:t>-</a:t>
+            </a:r>
+            <a:r>
+              <a:rPr lang="nl-NL" dirty="0" err="1"/>
+              <a:t>layout</a:t>
+            </a:r>
+            <a:endParaRPr lang="nl-NL" dirty="0"/>
+          </a:p>
+        </p:txBody>
+      </p:sp>
+      <p:pic>
+        <p:nvPicPr>
+          <p:cNvPr id="6" name="Picture 5">
+            <a:extLst>
+              <a:ext uri="{FF2B5EF4-FFF2-40B4-BE49-F238E27FC236}">
+                <a16:creationId xmlns:a16="http://schemas.microsoft.com/office/drawing/2014/main" id="{1CBA1E14-C495-8D98-651B-5B5E01D72D57}"/>
+              </a:ext>
+            </a:extLst>
+          </p:cNvPr>
+          <p:cNvPicPr>
+            <a:picLocks noChangeAspect="1"/>
+          </p:cNvPicPr>
+          <p:nvPr/>
+        </p:nvPicPr>
+        <p:blipFill>
+          <a:blip r:embed="rId2"/>
+          <a:srcRect r="31498"/>
+          <a:stretch>
+            <a:fillRect/>
+          </a:stretch>
+        </p:blipFill>
+        <p:spPr>
+          <a:xfrm>
+            <a:off x="448457" y="3925795"/>
+            <a:ext cx="4138534" cy="2249028"/>
+          </a:xfrm>
+          <a:prstGeom prst="rect">
+            <a:avLst/>
+          </a:prstGeom>
+        </p:spPr>
+      </p:pic>
+      <p:pic>
+        <p:nvPicPr>
+          <p:cNvPr id="5" name="Picture 4">
+            <a:extLst>
+              <a:ext uri="{FF2B5EF4-FFF2-40B4-BE49-F238E27FC236}">
+                <a16:creationId xmlns:a16="http://schemas.microsoft.com/office/drawing/2014/main" id="{8F2ED398-406A-C5BF-9BA5-E0F4BA8AE251}"/>
+              </a:ext>
+            </a:extLst>
+          </p:cNvPr>
+          <p:cNvPicPr>
+            <a:picLocks noChangeAspect="1"/>
+          </p:cNvPicPr>
+          <p:nvPr/>
+        </p:nvPicPr>
+        <p:blipFill>
+          <a:blip r:embed="rId3"/>
+          <a:stretch>
+            <a:fillRect/>
+          </a:stretch>
+        </p:blipFill>
+        <p:spPr>
+          <a:xfrm>
+            <a:off x="5100560" y="3925795"/>
+            <a:ext cx="7091440" cy="1508817"/>
+          </a:xfrm>
+          <a:prstGeom prst="rect">
+            <a:avLst/>
+          </a:prstGeom>
+        </p:spPr>
+      </p:pic>
+    </p:spTree>
+    <p:extLst>
+      <p:ext uri="{BB962C8B-B14F-4D97-AF65-F5344CB8AC3E}">
+        <p14:creationId xmlns:p14="http://schemas.microsoft.com/office/powerpoint/2010/main" val="3814258140"/>
+      </p:ext>
+    </p:extLst>
+  </p:cSld>
+  <p:clrMapOvr>
+    <a:masterClrMapping/>
+  </p:clrMapOvr>
+</p:sld>
+</file>
+
+<file path=ppt/slides/slide8.xml><?xml version="1.0" encoding="utf-8"?>
 <p:sld xmlns:a="http://schemas.openxmlformats.org/drawingml/2006/main" xmlns:r="http://schemas.openxmlformats.org/officeDocument/2006/relationships" xmlns:p="http://schemas.openxmlformats.org/presentationml/2006/main">
   <p:cSld>
     <p:spTree>
@@ -4036,7 +4542,7 @@
           <a:p>
             <a:r>
               <a:rPr lang="nl-NL" dirty="0"/>
-              <a:t>Week 2</a:t>
+              <a:t>Deze week</a:t>
             </a:r>
           </a:p>
         </p:txBody>
@@ -4103,10 +4609,10 @@
       </p:sp>
       <p:pic>
         <p:nvPicPr>
-          <p:cNvPr id="5" name="Picture 4">
-            <a:extLst>
-              <a:ext uri="{FF2B5EF4-FFF2-40B4-BE49-F238E27FC236}">
-                <a16:creationId xmlns:a16="http://schemas.microsoft.com/office/drawing/2014/main" id="{83084535-B402-F0FA-B72E-CA604E155F75}"/>
+          <p:cNvPr id="6" name="Picture 5">
+            <a:extLst>
+              <a:ext uri="{FF2B5EF4-FFF2-40B4-BE49-F238E27FC236}">
+                <a16:creationId xmlns:a16="http://schemas.microsoft.com/office/drawing/2014/main" id="{D01BB828-AAA2-9681-7A36-627E554485A3}"/>
               </a:ext>
             </a:extLst>
           </p:cNvPr>
@@ -4123,8 +4629,8 @@
         </p:blipFill>
         <p:spPr>
           <a:xfrm>
-            <a:off x="5808531" y="4101968"/>
-            <a:ext cx="6188597" cy="1989192"/>
+            <a:off x="3898849" y="4693464"/>
+            <a:ext cx="7718528" cy="1799411"/>
           </a:xfrm>
           <a:prstGeom prst="rect">
             <a:avLst/>
